--- a/cablage_robot_pendule.pptx
+++ b/cablage_robot_pendule.pptx
@@ -300,7 +300,7 @@
             <a:fld id="{5BCAD085-E8A6-8845-BD4E-CB4CCA059FC4}" type="datetimeFigureOut">
               <a:rPr lang="en-US" smtClean="0"/>
               <a:pPr/>
-              <a:t>5/16/2026</a:t>
+              <a:t>5/22/2026</a:t>
             </a:fld>
             <a:endParaRPr lang="en-US"/>
           </a:p>
@@ -352,7 +352,7 @@
     </p:spTree>
     <p:extLst>
       <p:ext uri="{BB962C8B-B14F-4D97-AF65-F5344CB8AC3E}">
-        <p14:creationId xmlns:p14="http://schemas.microsoft.com/office/powerpoint/2010/main" xmlns="" val="3168075583"/>
+        <p14:creationId xmlns="" xmlns:p14="http://schemas.microsoft.com/office/powerpoint/2010/main" val="3168075583"/>
       </p:ext>
     </p:extLst>
   </p:cSld>
@@ -472,7 +472,7 @@
             <a:fld id="{5BCAD085-E8A6-8845-BD4E-CB4CCA059FC4}" type="datetimeFigureOut">
               <a:rPr lang="en-US" smtClean="0"/>
               <a:pPr/>
-              <a:t>5/16/2026</a:t>
+              <a:t>5/22/2026</a:t>
             </a:fld>
             <a:endParaRPr lang="en-US"/>
           </a:p>
@@ -524,7 +524,7 @@
     </p:spTree>
     <p:extLst>
       <p:ext uri="{BB962C8B-B14F-4D97-AF65-F5344CB8AC3E}">
-        <p14:creationId xmlns:p14="http://schemas.microsoft.com/office/powerpoint/2010/main" xmlns="" val="2910927964"/>
+        <p14:creationId xmlns="" xmlns:p14="http://schemas.microsoft.com/office/powerpoint/2010/main" val="2910927964"/>
       </p:ext>
     </p:extLst>
   </p:cSld>
@@ -654,7 +654,7 @@
             <a:fld id="{5BCAD085-E8A6-8845-BD4E-CB4CCA059FC4}" type="datetimeFigureOut">
               <a:rPr lang="en-US" smtClean="0"/>
               <a:pPr/>
-              <a:t>5/16/2026</a:t>
+              <a:t>5/22/2026</a:t>
             </a:fld>
             <a:endParaRPr lang="en-US"/>
           </a:p>
@@ -706,7 +706,7 @@
     </p:spTree>
     <p:extLst>
       <p:ext uri="{BB962C8B-B14F-4D97-AF65-F5344CB8AC3E}">
-        <p14:creationId xmlns:p14="http://schemas.microsoft.com/office/powerpoint/2010/main" xmlns="" val="3612223792"/>
+        <p14:creationId xmlns="" xmlns:p14="http://schemas.microsoft.com/office/powerpoint/2010/main" val="3612223792"/>
       </p:ext>
     </p:extLst>
   </p:cSld>
@@ -826,7 +826,7 @@
             <a:fld id="{5BCAD085-E8A6-8845-BD4E-CB4CCA059FC4}" type="datetimeFigureOut">
               <a:rPr lang="en-US" smtClean="0"/>
               <a:pPr/>
-              <a:t>5/16/2026</a:t>
+              <a:t>5/22/2026</a:t>
             </a:fld>
             <a:endParaRPr lang="en-US"/>
           </a:p>
@@ -878,7 +878,7 @@
     </p:spTree>
     <p:extLst>
       <p:ext uri="{BB962C8B-B14F-4D97-AF65-F5344CB8AC3E}">
-        <p14:creationId xmlns:p14="http://schemas.microsoft.com/office/powerpoint/2010/main" xmlns="" val="2614314258"/>
+        <p14:creationId xmlns="" xmlns:p14="http://schemas.microsoft.com/office/powerpoint/2010/main" val="2614314258"/>
       </p:ext>
     </p:extLst>
   </p:cSld>
@@ -1074,7 +1074,7 @@
             <a:fld id="{5BCAD085-E8A6-8845-BD4E-CB4CCA059FC4}" type="datetimeFigureOut">
               <a:rPr lang="en-US" smtClean="0"/>
               <a:pPr/>
-              <a:t>5/16/2026</a:t>
+              <a:t>5/22/2026</a:t>
             </a:fld>
             <a:endParaRPr lang="en-US"/>
           </a:p>
@@ -1126,7 +1126,7 @@
     </p:spTree>
     <p:extLst>
       <p:ext uri="{BB962C8B-B14F-4D97-AF65-F5344CB8AC3E}">
-        <p14:creationId xmlns:p14="http://schemas.microsoft.com/office/powerpoint/2010/main" xmlns="" val="960648375"/>
+        <p14:creationId xmlns="" xmlns:p14="http://schemas.microsoft.com/office/powerpoint/2010/main" val="960648375"/>
       </p:ext>
     </p:extLst>
   </p:cSld>
@@ -1364,7 +1364,7 @@
             <a:fld id="{5BCAD085-E8A6-8845-BD4E-CB4CCA059FC4}" type="datetimeFigureOut">
               <a:rPr lang="en-US" smtClean="0"/>
               <a:pPr/>
-              <a:t>5/16/2026</a:t>
+              <a:t>5/22/2026</a:t>
             </a:fld>
             <a:endParaRPr lang="en-US"/>
           </a:p>
@@ -1416,7 +1416,7 @@
     </p:spTree>
     <p:extLst>
       <p:ext uri="{BB962C8B-B14F-4D97-AF65-F5344CB8AC3E}">
-        <p14:creationId xmlns:p14="http://schemas.microsoft.com/office/powerpoint/2010/main" xmlns="" val="2782244947"/>
+        <p14:creationId xmlns="" xmlns:p14="http://schemas.microsoft.com/office/powerpoint/2010/main" val="2782244947"/>
       </p:ext>
     </p:extLst>
   </p:cSld>
@@ -1788,7 +1788,7 @@
             <a:fld id="{5BCAD085-E8A6-8845-BD4E-CB4CCA059FC4}" type="datetimeFigureOut">
               <a:rPr lang="en-US" smtClean="0"/>
               <a:pPr/>
-              <a:t>5/16/2026</a:t>
+              <a:t>5/22/2026</a:t>
             </a:fld>
             <a:endParaRPr lang="en-US"/>
           </a:p>
@@ -1840,7 +1840,7 @@
     </p:spTree>
     <p:extLst>
       <p:ext uri="{BB962C8B-B14F-4D97-AF65-F5344CB8AC3E}">
-        <p14:creationId xmlns:p14="http://schemas.microsoft.com/office/powerpoint/2010/main" xmlns="" val="990158736"/>
+        <p14:creationId xmlns="" xmlns:p14="http://schemas.microsoft.com/office/powerpoint/2010/main" val="990158736"/>
       </p:ext>
     </p:extLst>
   </p:cSld>
@@ -1908,7 +1908,7 @@
             <a:fld id="{5BCAD085-E8A6-8845-BD4E-CB4CCA059FC4}" type="datetimeFigureOut">
               <a:rPr lang="en-US" smtClean="0"/>
               <a:pPr/>
-              <a:t>5/16/2026</a:t>
+              <a:t>5/22/2026</a:t>
             </a:fld>
             <a:endParaRPr lang="en-US"/>
           </a:p>
@@ -1960,7 +1960,7 @@
     </p:spTree>
     <p:extLst>
       <p:ext uri="{BB962C8B-B14F-4D97-AF65-F5344CB8AC3E}">
-        <p14:creationId xmlns:p14="http://schemas.microsoft.com/office/powerpoint/2010/main" xmlns="" val="727027711"/>
+        <p14:creationId xmlns="" xmlns:p14="http://schemas.microsoft.com/office/powerpoint/2010/main" val="727027711"/>
       </p:ext>
     </p:extLst>
   </p:cSld>
@@ -2005,7 +2005,7 @@
             <a:fld id="{5BCAD085-E8A6-8845-BD4E-CB4CCA059FC4}" type="datetimeFigureOut">
               <a:rPr lang="en-US" smtClean="0"/>
               <a:pPr/>
-              <a:t>5/16/2026</a:t>
+              <a:t>5/22/2026</a:t>
             </a:fld>
             <a:endParaRPr lang="en-US"/>
           </a:p>
@@ -2057,7 +2057,7 @@
     </p:spTree>
     <p:extLst>
       <p:ext uri="{BB962C8B-B14F-4D97-AF65-F5344CB8AC3E}">
-        <p14:creationId xmlns:p14="http://schemas.microsoft.com/office/powerpoint/2010/main" xmlns="" val="1212999818"/>
+        <p14:creationId xmlns="" xmlns:p14="http://schemas.microsoft.com/office/powerpoint/2010/main" val="1212999818"/>
       </p:ext>
     </p:extLst>
   </p:cSld>
@@ -2284,7 +2284,7 @@
             <a:fld id="{5BCAD085-E8A6-8845-BD4E-CB4CCA059FC4}" type="datetimeFigureOut">
               <a:rPr lang="en-US" smtClean="0"/>
               <a:pPr/>
-              <a:t>5/16/2026</a:t>
+              <a:t>5/22/2026</a:t>
             </a:fld>
             <a:endParaRPr lang="en-US"/>
           </a:p>
@@ -2336,7 +2336,7 @@
     </p:spTree>
     <p:extLst>
       <p:ext uri="{BB962C8B-B14F-4D97-AF65-F5344CB8AC3E}">
-        <p14:creationId xmlns:p14="http://schemas.microsoft.com/office/powerpoint/2010/main" xmlns="" val="1840726560"/>
+        <p14:creationId xmlns="" xmlns:p14="http://schemas.microsoft.com/office/powerpoint/2010/main" val="1840726560"/>
       </p:ext>
     </p:extLst>
   </p:cSld>
@@ -2539,7 +2539,7 @@
             <a:fld id="{5BCAD085-E8A6-8845-BD4E-CB4CCA059FC4}" type="datetimeFigureOut">
               <a:rPr lang="en-US" smtClean="0"/>
               <a:pPr/>
-              <a:t>5/16/2026</a:t>
+              <a:t>5/22/2026</a:t>
             </a:fld>
             <a:endParaRPr lang="en-US"/>
           </a:p>
@@ -2591,7 +2591,7 @@
     </p:spTree>
     <p:extLst>
       <p:ext uri="{BB962C8B-B14F-4D97-AF65-F5344CB8AC3E}">
-        <p14:creationId xmlns:p14="http://schemas.microsoft.com/office/powerpoint/2010/main" xmlns="" val="3889236939"/>
+        <p14:creationId xmlns="" xmlns:p14="http://schemas.microsoft.com/office/powerpoint/2010/main" val="3889236939"/>
       </p:ext>
     </p:extLst>
   </p:cSld>
@@ -2754,7 +2754,7 @@
             <a:fld id="{5BCAD085-E8A6-8845-BD4E-CB4CCA059FC4}" type="datetimeFigureOut">
               <a:rPr lang="en-US" smtClean="0"/>
               <a:pPr/>
-              <a:t>5/16/2026</a:t>
+              <a:t>5/22/2026</a:t>
             </a:fld>
             <a:endParaRPr lang="en-US"/>
           </a:p>
@@ -2842,7 +2842,7 @@
     </p:spTree>
     <p:extLst>
       <p:ext uri="{BB962C8B-B14F-4D97-AF65-F5344CB8AC3E}">
-        <p14:creationId xmlns:p14="http://schemas.microsoft.com/office/powerpoint/2010/main" xmlns="" val="2209977519"/>
+        <p14:creationId xmlns="" xmlns:p14="http://schemas.microsoft.com/office/powerpoint/2010/main" val="2209977519"/>
       </p:ext>
     </p:extLst>
   </p:cSld>
@@ -9427,7 +9427,7 @@
             <a:avLst/>
           </a:prstGeom>
           <a:solidFill>
-            <a:srgbClr val="00BFFF"/>
+            <a:srgbClr val="00B050"/>
           </a:solidFill>
           <a:ln w="12700">
             <a:solidFill>
@@ -9454,7 +9454,11 @@
           <a:lstStyle/>
           <a:p>
             <a:pPr algn="ctr"/>
-            <a:endParaRPr/>
+            <a:endParaRPr dirty="0">
+              <a:solidFill>
+                <a:srgbClr val="00B050"/>
+              </a:solidFill>
+            </a:endParaRPr>
           </a:p>
         </p:txBody>
       </p:sp>
@@ -9482,12 +9486,28 @@
           <a:p>
             <a:pPr algn="l"/>
             <a:r>
-              <a:rPr sz="1300" b="1" i="0">
+              <a:rPr sz="1300" b="1" i="0" dirty="0">
                 <a:solidFill>
                   <a:srgbClr val="1A1A2E"/>
                 </a:solidFill>
               </a:rPr>
-              <a:t>IMU — ISM330DHCX  (I2C3 · PB13 SCL / PB11 SDA · adresse 0x6B)</a:t>
+              <a:t>IMU — ISM330DHCX  (I2C3 · PB13 SCL / PB11 SDA · </a:t>
+            </a:r>
+            <a:r>
+              <a:rPr sz="1300" b="1" i="0" dirty="0" err="1">
+                <a:solidFill>
+                  <a:srgbClr val="1A1A2E"/>
+                </a:solidFill>
+              </a:rPr>
+              <a:t>adresse</a:t>
+            </a:r>
+            <a:r>
+              <a:rPr sz="1300" b="1" i="0" dirty="0">
+                <a:solidFill>
+                  <a:srgbClr val="1A1A2E"/>
+                </a:solidFill>
+              </a:rPr>
+              <a:t> 0x6B)</a:t>
             </a:r>
           </a:p>
         </p:txBody>
@@ -34766,7 +34786,7 @@
         </p:nvSpPr>
         <p:spPr>
           <a:xfrm>
-            <a:off x="7315200" y="1234440"/>
+            <a:off x="8438606" y="1097280"/>
             <a:ext cx="4572000" cy="347472"/>
           </a:xfrm>
           <a:prstGeom prst="rect">
@@ -34810,7 +34830,7 @@
         </p:nvSpPr>
         <p:spPr>
           <a:xfrm>
-            <a:off x="7388352" y="1252728"/>
+            <a:off x="8511758" y="1115568"/>
             <a:ext cx="4480560" cy="347472"/>
           </a:xfrm>
           <a:prstGeom prst="rect">
@@ -34844,7 +34864,7 @@
         </p:nvSpPr>
         <p:spPr>
           <a:xfrm>
-            <a:off x="7315200" y="1600200"/>
+            <a:off x="8438606" y="1463040"/>
             <a:ext cx="4572000" cy="402336"/>
           </a:xfrm>
           <a:prstGeom prst="rect">
@@ -34890,7 +34910,7 @@
         </p:nvSpPr>
         <p:spPr>
           <a:xfrm>
-            <a:off x="7452360" y="1655064"/>
+            <a:off x="8575766" y="1517904"/>
             <a:ext cx="4297680" cy="347472"/>
           </a:xfrm>
           <a:prstGeom prst="rect">
@@ -34924,7 +34944,7 @@
         </p:nvSpPr>
         <p:spPr>
           <a:xfrm>
-            <a:off x="7315200" y="2075688"/>
+            <a:off x="8438606" y="1938528"/>
             <a:ext cx="4572000" cy="402336"/>
           </a:xfrm>
           <a:prstGeom prst="rect">
@@ -34970,7 +34990,7 @@
         </p:nvSpPr>
         <p:spPr>
           <a:xfrm>
-            <a:off x="7452360" y="2130552"/>
+            <a:off x="8575766" y="1993392"/>
             <a:ext cx="4297680" cy="347472"/>
           </a:xfrm>
           <a:prstGeom prst="rect">
@@ -35004,7 +35024,7 @@
         </p:nvSpPr>
         <p:spPr>
           <a:xfrm>
-            <a:off x="7315200" y="2551176"/>
+            <a:off x="8438606" y="2414016"/>
             <a:ext cx="4572000" cy="402336"/>
           </a:xfrm>
           <a:prstGeom prst="rect">
@@ -35050,7 +35070,7 @@
         </p:nvSpPr>
         <p:spPr>
           <a:xfrm>
-            <a:off x="7452360" y="2606040"/>
+            <a:off x="8575766" y="2468880"/>
             <a:ext cx="4297680" cy="347472"/>
           </a:xfrm>
           <a:prstGeom prst="rect">
@@ -35084,7 +35104,7 @@
         </p:nvSpPr>
         <p:spPr>
           <a:xfrm>
-            <a:off x="7315200" y="3108960"/>
+            <a:off x="8438606" y="2971800"/>
             <a:ext cx="4572000" cy="457200"/>
           </a:xfrm>
           <a:prstGeom prst="rect">
@@ -35118,7 +35138,7 @@
         </p:nvSpPr>
         <p:spPr>
           <a:xfrm>
-            <a:off x="7315200" y="3566160"/>
+            <a:off x="8438606" y="3429000"/>
             <a:ext cx="4572000" cy="347472"/>
           </a:xfrm>
           <a:prstGeom prst="rect">
@@ -35162,7 +35182,7 @@
         </p:nvSpPr>
         <p:spPr>
           <a:xfrm>
-            <a:off x="7388352" y="3584448"/>
+            <a:off x="8511758" y="3447288"/>
             <a:ext cx="4480560" cy="347472"/>
           </a:xfrm>
           <a:prstGeom prst="rect">
@@ -35196,7 +35216,7 @@
         </p:nvSpPr>
         <p:spPr>
           <a:xfrm>
-            <a:off x="7406640" y="3931920"/>
+            <a:off x="8530046" y="3794760"/>
             <a:ext cx="4389120" cy="384048"/>
           </a:xfrm>
           <a:prstGeom prst="rect">
@@ -35230,7 +35250,7 @@
         </p:nvSpPr>
         <p:spPr>
           <a:xfrm>
-            <a:off x="7406640" y="4315968"/>
+            <a:off x="8530046" y="4178808"/>
             <a:ext cx="4389120" cy="384048"/>
           </a:xfrm>
           <a:prstGeom prst="rect">
@@ -35264,7 +35284,7 @@
         </p:nvSpPr>
         <p:spPr>
           <a:xfrm>
-            <a:off x="7315200" y="4937760"/>
+            <a:off x="8438606" y="4800600"/>
             <a:ext cx="4663440" cy="1188720"/>
           </a:xfrm>
           <a:prstGeom prst="rect">

--- a/cablage_robot_pendule.pptx
+++ b/cablage_robot_pendule.pptx
@@ -17,6 +17,7 @@
     <p:sldId id="265" r:id="rId11"/>
     <p:sldId id="266" r:id="rId12"/>
     <p:sldId id="267" r:id="rId13"/>
+    <p:sldId id="268" r:id="rId14"/>
   </p:sldIdLst>
   <p:sldSz cx="12188825" cy="6858000"/>
   <p:notesSz cx="6858000" cy="9144000"/>
@@ -300,7 +301,7 @@
             <a:fld id="{5BCAD085-E8A6-8845-BD4E-CB4CCA059FC4}" type="datetimeFigureOut">
               <a:rPr lang="en-US" smtClean="0"/>
               <a:pPr/>
-              <a:t>5/22/2026</a:t>
+              <a:t>6/17/2026</a:t>
             </a:fld>
             <a:endParaRPr lang="en-US"/>
           </a:p>
@@ -352,7 +353,7 @@
     </p:spTree>
     <p:extLst>
       <p:ext uri="{BB962C8B-B14F-4D97-AF65-F5344CB8AC3E}">
-        <p14:creationId xmlns="" xmlns:p14="http://schemas.microsoft.com/office/powerpoint/2010/main" val="3168075583"/>
+        <p14:creationId xmlns:p14="http://schemas.microsoft.com/office/powerpoint/2010/main" xmlns="" val="3168075583"/>
       </p:ext>
     </p:extLst>
   </p:cSld>
@@ -472,7 +473,7 @@
             <a:fld id="{5BCAD085-E8A6-8845-BD4E-CB4CCA059FC4}" type="datetimeFigureOut">
               <a:rPr lang="en-US" smtClean="0"/>
               <a:pPr/>
-              <a:t>5/22/2026</a:t>
+              <a:t>6/17/2026</a:t>
             </a:fld>
             <a:endParaRPr lang="en-US"/>
           </a:p>
@@ -524,7 +525,7 @@
     </p:spTree>
     <p:extLst>
       <p:ext uri="{BB962C8B-B14F-4D97-AF65-F5344CB8AC3E}">
-        <p14:creationId xmlns="" xmlns:p14="http://schemas.microsoft.com/office/powerpoint/2010/main" val="2910927964"/>
+        <p14:creationId xmlns:p14="http://schemas.microsoft.com/office/powerpoint/2010/main" xmlns="" val="2910927964"/>
       </p:ext>
     </p:extLst>
   </p:cSld>
@@ -654,7 +655,7 @@
             <a:fld id="{5BCAD085-E8A6-8845-BD4E-CB4CCA059FC4}" type="datetimeFigureOut">
               <a:rPr lang="en-US" smtClean="0"/>
               <a:pPr/>
-              <a:t>5/22/2026</a:t>
+              <a:t>6/17/2026</a:t>
             </a:fld>
             <a:endParaRPr lang="en-US"/>
           </a:p>
@@ -706,7 +707,7 @@
     </p:spTree>
     <p:extLst>
       <p:ext uri="{BB962C8B-B14F-4D97-AF65-F5344CB8AC3E}">
-        <p14:creationId xmlns="" xmlns:p14="http://schemas.microsoft.com/office/powerpoint/2010/main" val="3612223792"/>
+        <p14:creationId xmlns:p14="http://schemas.microsoft.com/office/powerpoint/2010/main" xmlns="" val="3612223792"/>
       </p:ext>
     </p:extLst>
   </p:cSld>
@@ -826,7 +827,7 @@
             <a:fld id="{5BCAD085-E8A6-8845-BD4E-CB4CCA059FC4}" type="datetimeFigureOut">
               <a:rPr lang="en-US" smtClean="0"/>
               <a:pPr/>
-              <a:t>5/22/2026</a:t>
+              <a:t>6/17/2026</a:t>
             </a:fld>
             <a:endParaRPr lang="en-US"/>
           </a:p>
@@ -878,7 +879,7 @@
     </p:spTree>
     <p:extLst>
       <p:ext uri="{BB962C8B-B14F-4D97-AF65-F5344CB8AC3E}">
-        <p14:creationId xmlns="" xmlns:p14="http://schemas.microsoft.com/office/powerpoint/2010/main" val="2614314258"/>
+        <p14:creationId xmlns:p14="http://schemas.microsoft.com/office/powerpoint/2010/main" xmlns="" val="2614314258"/>
       </p:ext>
     </p:extLst>
   </p:cSld>
@@ -1074,7 +1075,7 @@
             <a:fld id="{5BCAD085-E8A6-8845-BD4E-CB4CCA059FC4}" type="datetimeFigureOut">
               <a:rPr lang="en-US" smtClean="0"/>
               <a:pPr/>
-              <a:t>5/22/2026</a:t>
+              <a:t>6/17/2026</a:t>
             </a:fld>
             <a:endParaRPr lang="en-US"/>
           </a:p>
@@ -1126,7 +1127,7 @@
     </p:spTree>
     <p:extLst>
       <p:ext uri="{BB962C8B-B14F-4D97-AF65-F5344CB8AC3E}">
-        <p14:creationId xmlns="" xmlns:p14="http://schemas.microsoft.com/office/powerpoint/2010/main" val="960648375"/>
+        <p14:creationId xmlns:p14="http://schemas.microsoft.com/office/powerpoint/2010/main" xmlns="" val="960648375"/>
       </p:ext>
     </p:extLst>
   </p:cSld>
@@ -1364,7 +1365,7 @@
             <a:fld id="{5BCAD085-E8A6-8845-BD4E-CB4CCA059FC4}" type="datetimeFigureOut">
               <a:rPr lang="en-US" smtClean="0"/>
               <a:pPr/>
-              <a:t>5/22/2026</a:t>
+              <a:t>6/17/2026</a:t>
             </a:fld>
             <a:endParaRPr lang="en-US"/>
           </a:p>
@@ -1416,7 +1417,7 @@
     </p:spTree>
     <p:extLst>
       <p:ext uri="{BB962C8B-B14F-4D97-AF65-F5344CB8AC3E}">
-        <p14:creationId xmlns="" xmlns:p14="http://schemas.microsoft.com/office/powerpoint/2010/main" val="2782244947"/>
+        <p14:creationId xmlns:p14="http://schemas.microsoft.com/office/powerpoint/2010/main" xmlns="" val="2782244947"/>
       </p:ext>
     </p:extLst>
   </p:cSld>
@@ -1788,7 +1789,7 @@
             <a:fld id="{5BCAD085-E8A6-8845-BD4E-CB4CCA059FC4}" type="datetimeFigureOut">
               <a:rPr lang="en-US" smtClean="0"/>
               <a:pPr/>
-              <a:t>5/22/2026</a:t>
+              <a:t>6/17/2026</a:t>
             </a:fld>
             <a:endParaRPr lang="en-US"/>
           </a:p>
@@ -1840,7 +1841,7 @@
     </p:spTree>
     <p:extLst>
       <p:ext uri="{BB962C8B-B14F-4D97-AF65-F5344CB8AC3E}">
-        <p14:creationId xmlns="" xmlns:p14="http://schemas.microsoft.com/office/powerpoint/2010/main" val="990158736"/>
+        <p14:creationId xmlns:p14="http://schemas.microsoft.com/office/powerpoint/2010/main" xmlns="" val="990158736"/>
       </p:ext>
     </p:extLst>
   </p:cSld>
@@ -1908,7 +1909,7 @@
             <a:fld id="{5BCAD085-E8A6-8845-BD4E-CB4CCA059FC4}" type="datetimeFigureOut">
               <a:rPr lang="en-US" smtClean="0"/>
               <a:pPr/>
-              <a:t>5/22/2026</a:t>
+              <a:t>6/17/2026</a:t>
             </a:fld>
             <a:endParaRPr lang="en-US"/>
           </a:p>
@@ -1960,7 +1961,7 @@
     </p:spTree>
     <p:extLst>
       <p:ext uri="{BB962C8B-B14F-4D97-AF65-F5344CB8AC3E}">
-        <p14:creationId xmlns="" xmlns:p14="http://schemas.microsoft.com/office/powerpoint/2010/main" val="727027711"/>
+        <p14:creationId xmlns:p14="http://schemas.microsoft.com/office/powerpoint/2010/main" xmlns="" val="727027711"/>
       </p:ext>
     </p:extLst>
   </p:cSld>
@@ -2005,7 +2006,7 @@
             <a:fld id="{5BCAD085-E8A6-8845-BD4E-CB4CCA059FC4}" type="datetimeFigureOut">
               <a:rPr lang="en-US" smtClean="0"/>
               <a:pPr/>
-              <a:t>5/22/2026</a:t>
+              <a:t>6/17/2026</a:t>
             </a:fld>
             <a:endParaRPr lang="en-US"/>
           </a:p>
@@ -2057,7 +2058,7 @@
     </p:spTree>
     <p:extLst>
       <p:ext uri="{BB962C8B-B14F-4D97-AF65-F5344CB8AC3E}">
-        <p14:creationId xmlns="" xmlns:p14="http://schemas.microsoft.com/office/powerpoint/2010/main" val="1212999818"/>
+        <p14:creationId xmlns:p14="http://schemas.microsoft.com/office/powerpoint/2010/main" xmlns="" val="1212999818"/>
       </p:ext>
     </p:extLst>
   </p:cSld>
@@ -2284,7 +2285,7 @@
             <a:fld id="{5BCAD085-E8A6-8845-BD4E-CB4CCA059FC4}" type="datetimeFigureOut">
               <a:rPr lang="en-US" smtClean="0"/>
               <a:pPr/>
-              <a:t>5/22/2026</a:t>
+              <a:t>6/17/2026</a:t>
             </a:fld>
             <a:endParaRPr lang="en-US"/>
           </a:p>
@@ -2336,7 +2337,7 @@
     </p:spTree>
     <p:extLst>
       <p:ext uri="{BB962C8B-B14F-4D97-AF65-F5344CB8AC3E}">
-        <p14:creationId xmlns="" xmlns:p14="http://schemas.microsoft.com/office/powerpoint/2010/main" val="1840726560"/>
+        <p14:creationId xmlns:p14="http://schemas.microsoft.com/office/powerpoint/2010/main" xmlns="" val="1840726560"/>
       </p:ext>
     </p:extLst>
   </p:cSld>
@@ -2539,7 +2540,7 @@
             <a:fld id="{5BCAD085-E8A6-8845-BD4E-CB4CCA059FC4}" type="datetimeFigureOut">
               <a:rPr lang="en-US" smtClean="0"/>
               <a:pPr/>
-              <a:t>5/22/2026</a:t>
+              <a:t>6/17/2026</a:t>
             </a:fld>
             <a:endParaRPr lang="en-US"/>
           </a:p>
@@ -2591,7 +2592,7 @@
     </p:spTree>
     <p:extLst>
       <p:ext uri="{BB962C8B-B14F-4D97-AF65-F5344CB8AC3E}">
-        <p14:creationId xmlns="" xmlns:p14="http://schemas.microsoft.com/office/powerpoint/2010/main" val="3889236939"/>
+        <p14:creationId xmlns:p14="http://schemas.microsoft.com/office/powerpoint/2010/main" xmlns="" val="3889236939"/>
       </p:ext>
     </p:extLst>
   </p:cSld>
@@ -2754,7 +2755,7 @@
             <a:fld id="{5BCAD085-E8A6-8845-BD4E-CB4CCA059FC4}" type="datetimeFigureOut">
               <a:rPr lang="en-US" smtClean="0"/>
               <a:pPr/>
-              <a:t>5/22/2026</a:t>
+              <a:t>6/17/2026</a:t>
             </a:fld>
             <a:endParaRPr lang="en-US"/>
           </a:p>
@@ -2842,7 +2843,7 @@
     </p:spTree>
     <p:extLst>
       <p:ext uri="{BB962C8B-B14F-4D97-AF65-F5344CB8AC3E}">
-        <p14:creationId xmlns="" xmlns:p14="http://schemas.microsoft.com/office/powerpoint/2010/main" val="2209977519"/>
+        <p14:creationId xmlns:p14="http://schemas.microsoft.com/office/powerpoint/2010/main" xmlns="" val="2209977519"/>
       </p:ext>
     </p:extLst>
   </p:cSld>
@@ -22248,6 +22249,64 @@
           </a:p>
         </p:txBody>
       </p:sp>
+    </p:spTree>
+  </p:cSld>
+  <p:clrMapOvr>
+    <a:masterClrMapping/>
+  </p:clrMapOvr>
+</p:sld>
+</file>
+
+<file path=ppt/slides/slide13.xml><?xml version="1.0" encoding="utf-8"?>
+<p:sld xmlns:a="http://schemas.openxmlformats.org/drawingml/2006/main" xmlns:r="http://schemas.openxmlformats.org/officeDocument/2006/relationships" xmlns:p="http://schemas.openxmlformats.org/presentationml/2006/main">
+  <p:cSld>
+    <p:spTree>
+      <p:nvGrpSpPr>
+        <p:cNvPr id="1" name=""/>
+        <p:cNvGrpSpPr/>
+        <p:nvPr/>
+      </p:nvGrpSpPr>
+      <p:grpSpPr>
+        <a:xfrm>
+          <a:off x="0" y="0"/>
+          <a:ext cx="0" cy="0"/>
+          <a:chOff x="0" y="0"/>
+          <a:chExt cx="0" cy="0"/>
+        </a:xfrm>
+      </p:grpSpPr>
+      <p:pic>
+        <p:nvPicPr>
+          <p:cNvPr id="1026" name="Picture 2"/>
+          <p:cNvPicPr>
+            <a:picLocks noChangeAspect="1" noChangeArrowheads="1"/>
+          </p:cNvPicPr>
+          <p:nvPr/>
+        </p:nvPicPr>
+        <p:blipFill>
+          <a:blip r:embed="rId2"/>
+          <a:srcRect/>
+          <a:stretch>
+            <a:fillRect/>
+          </a:stretch>
+        </p:blipFill>
+        <p:spPr bwMode="auto">
+          <a:xfrm>
+            <a:off x="4248150" y="492125"/>
+            <a:ext cx="3695700" cy="5878513"/>
+          </a:xfrm>
+          <a:prstGeom prst="rect">
+            <a:avLst/>
+          </a:prstGeom>
+          <a:noFill/>
+          <a:ln w="9525">
+            <a:noFill/>
+            <a:miter lim="800000"/>
+            <a:headEnd/>
+            <a:tailEnd/>
+          </a:ln>
+          <a:effectLst/>
+        </p:spPr>
+      </p:pic>
     </p:spTree>
   </p:cSld>
   <p:clrMapOvr>
